--- a/SapioSpend_Presentation.pptx
+++ b/SapioSpend_Presentation.pptx
@@ -5,20 +5,20 @@
     <p:sldMasterId id="2147483648" r:id="rId1"/>
   </p:sldMasterIdLst>
   <p:sldIdLst>
-    <p:sldId id="256" r:id="rId7"/>
-    <p:sldId id="257" r:id="rId8"/>
-    <p:sldId id="258" r:id="rId9"/>
-    <p:sldId id="259" r:id="rId10"/>
-    <p:sldId id="260" r:id="rId11"/>
-    <p:sldId id="261" r:id="rId12"/>
-    <p:sldId id="262" r:id="rId13"/>
-    <p:sldId id="263" r:id="rId14"/>
-    <p:sldId id="264" r:id="rId15"/>
-    <p:sldId id="265" r:id="rId16"/>
-    <p:sldId id="266" r:id="rId17"/>
-    <p:sldId id="267" r:id="rId18"/>
+    <p:sldId id="256" r:id="rId2"/>
+    <p:sldId id="257" r:id="rId3"/>
+    <p:sldId id="258" r:id="rId4"/>
+    <p:sldId id="259" r:id="rId5"/>
+    <p:sldId id="260" r:id="rId6"/>
+    <p:sldId id="261" r:id="rId7"/>
+    <p:sldId id="262" r:id="rId8"/>
+    <p:sldId id="263" r:id="rId9"/>
+    <p:sldId id="264" r:id="rId10"/>
+    <p:sldId id="265" r:id="rId11"/>
+    <p:sldId id="266" r:id="rId12"/>
+    <p:sldId id="267" r:id="rId13"/>
   </p:sldIdLst>
-  <p:sldSz cx="12188952" cy="6858000" type="screen4x3"/>
+  <p:sldSz cx="12188825" cy="6858000"/>
   <p:notesSz cx="6858000" cy="9144000"/>
   <p:defaultTextStyle>
     <a:defPPr>
@@ -115,6 +115,22 @@
       </a:defRPr>
     </a:lvl9pPr>
   </p:defaultTextStyle>
+  <p:extLst>
+    <p:ext uri="{EFAFB233-063F-42B5-8137-9DF3F51BA10A}">
+      <p15:sldGuideLst xmlns:p15="http://schemas.microsoft.com/office/powerpoint/2012/main">
+        <p15:guide id="1" orient="horz" pos="2160">
+          <p15:clr>
+            <a:srgbClr val="A4A3A4"/>
+          </p15:clr>
+        </p15:guide>
+        <p15:guide id="2" pos="2880">
+          <p15:clr>
+            <a:srgbClr val="A4A3A4"/>
+          </p15:clr>
+        </p15:guide>
+      </p15:sldGuideLst>
+    </p:ext>
+  </p:extLst>
 </p:presentation>
 </file>
 
@@ -156,10 +172,9 @@
           <a:lstStyle/>
           <a:p>
             <a:r>
-              <a:rPr lang="en-US" smtClean="0"/>
+              <a:rPr lang="en-US"/>
               <a:t>Click to edit Master title style</a:t>
             </a:r>
-            <a:endParaRPr lang="en-US"/>
           </a:p>
         </p:txBody>
       </p:sp>
@@ -275,10 +290,9 @@
           </a:lstStyle>
           <a:p>
             <a:r>
-              <a:rPr lang="en-US" smtClean="0"/>
+              <a:rPr lang="en-US"/>
               <a:t>Click to edit Master subtitle style</a:t>
             </a:r>
-            <a:endParaRPr lang="en-US"/>
           </a:p>
         </p:txBody>
       </p:sp>
@@ -299,7 +313,7 @@
           <a:p>
             <a:fld id="{5BCAD085-E8A6-8845-BD4E-CB4CCA059FC4}" type="datetimeFigureOut">
               <a:rPr lang="en-US" smtClean="0"/>
-              <a:t>1/27/13</a:t>
+              <a:t>7/1/26</a:t>
             </a:fld>
             <a:endParaRPr lang="en-US"/>
           </a:p>
@@ -393,10 +407,9 @@
           <a:lstStyle/>
           <a:p>
             <a:r>
-              <a:rPr lang="en-US" smtClean="0"/>
+              <a:rPr lang="en-US"/>
               <a:t>Click to edit Master title style</a:t>
             </a:r>
-            <a:endParaRPr lang="en-US"/>
           </a:p>
         </p:txBody>
       </p:sp>
@@ -417,38 +430,37 @@
           <a:p>
             <a:pPr lvl="0"/>
             <a:r>
-              <a:rPr lang="en-US" smtClean="0"/>
+              <a:rPr lang="en-US"/>
               <a:t>Click to edit Master text styles</a:t>
             </a:r>
           </a:p>
           <a:p>
             <a:pPr lvl="1"/>
             <a:r>
-              <a:rPr lang="en-US" smtClean="0"/>
+              <a:rPr lang="en-US"/>
               <a:t>Second level</a:t>
             </a:r>
           </a:p>
           <a:p>
             <a:pPr lvl="2"/>
             <a:r>
-              <a:rPr lang="en-US" smtClean="0"/>
+              <a:rPr lang="en-US"/>
               <a:t>Third level</a:t>
             </a:r>
           </a:p>
           <a:p>
             <a:pPr lvl="3"/>
             <a:r>
-              <a:rPr lang="en-US" smtClean="0"/>
+              <a:rPr lang="en-US"/>
               <a:t>Fourth level</a:t>
             </a:r>
           </a:p>
           <a:p>
             <a:pPr lvl="4"/>
             <a:r>
-              <a:rPr lang="en-US" smtClean="0"/>
+              <a:rPr lang="en-US"/>
               <a:t>Fifth level</a:t>
             </a:r>
-            <a:endParaRPr lang="en-US"/>
           </a:p>
         </p:txBody>
       </p:sp>
@@ -469,7 +481,7 @@
           <a:p>
             <a:fld id="{5BCAD085-E8A6-8845-BD4E-CB4CCA059FC4}" type="datetimeFigureOut">
               <a:rPr lang="en-US" smtClean="0"/>
-              <a:t>1/27/13</a:t>
+              <a:t>7/1/26</a:t>
             </a:fld>
             <a:endParaRPr lang="en-US"/>
           </a:p>
@@ -568,10 +580,9 @@
           <a:lstStyle/>
           <a:p>
             <a:r>
-              <a:rPr lang="en-US" smtClean="0"/>
+              <a:rPr lang="en-US"/>
               <a:t>Click to edit Master title style</a:t>
             </a:r>
-            <a:endParaRPr lang="en-US"/>
           </a:p>
         </p:txBody>
       </p:sp>
@@ -597,38 +608,37 @@
           <a:p>
             <a:pPr lvl="0"/>
             <a:r>
-              <a:rPr lang="en-US" smtClean="0"/>
+              <a:rPr lang="en-US"/>
               <a:t>Click to edit Master text styles</a:t>
             </a:r>
           </a:p>
           <a:p>
             <a:pPr lvl="1"/>
             <a:r>
-              <a:rPr lang="en-US" smtClean="0"/>
+              <a:rPr lang="en-US"/>
               <a:t>Second level</a:t>
             </a:r>
           </a:p>
           <a:p>
             <a:pPr lvl="2"/>
             <a:r>
-              <a:rPr lang="en-US" smtClean="0"/>
+              <a:rPr lang="en-US"/>
               <a:t>Third level</a:t>
             </a:r>
           </a:p>
           <a:p>
             <a:pPr lvl="3"/>
             <a:r>
-              <a:rPr lang="en-US" smtClean="0"/>
+              <a:rPr lang="en-US"/>
               <a:t>Fourth level</a:t>
             </a:r>
           </a:p>
           <a:p>
             <a:pPr lvl="4"/>
             <a:r>
-              <a:rPr lang="en-US" smtClean="0"/>
+              <a:rPr lang="en-US"/>
               <a:t>Fifth level</a:t>
             </a:r>
-            <a:endParaRPr lang="en-US"/>
           </a:p>
         </p:txBody>
       </p:sp>
@@ -649,7 +659,7 @@
           <a:p>
             <a:fld id="{5BCAD085-E8A6-8845-BD4E-CB4CCA059FC4}" type="datetimeFigureOut">
               <a:rPr lang="en-US" smtClean="0"/>
-              <a:t>1/27/13</a:t>
+              <a:t>7/1/26</a:t>
             </a:fld>
             <a:endParaRPr lang="en-US"/>
           </a:p>
@@ -743,10 +753,9 @@
           <a:lstStyle/>
           <a:p>
             <a:r>
-              <a:rPr lang="en-US" smtClean="0"/>
+              <a:rPr lang="en-US"/>
               <a:t>Click to edit Master title style</a:t>
             </a:r>
-            <a:endParaRPr lang="en-US"/>
           </a:p>
         </p:txBody>
       </p:sp>
@@ -767,38 +776,37 @@
           <a:p>
             <a:pPr lvl="0"/>
             <a:r>
-              <a:rPr lang="en-US" smtClean="0"/>
+              <a:rPr lang="en-US"/>
               <a:t>Click to edit Master text styles</a:t>
             </a:r>
           </a:p>
           <a:p>
             <a:pPr lvl="1"/>
             <a:r>
-              <a:rPr lang="en-US" smtClean="0"/>
+              <a:rPr lang="en-US"/>
               <a:t>Second level</a:t>
             </a:r>
           </a:p>
           <a:p>
             <a:pPr lvl="2"/>
             <a:r>
-              <a:rPr lang="en-US" smtClean="0"/>
+              <a:rPr lang="en-US"/>
               <a:t>Third level</a:t>
             </a:r>
           </a:p>
           <a:p>
             <a:pPr lvl="3"/>
             <a:r>
-              <a:rPr lang="en-US" smtClean="0"/>
+              <a:rPr lang="en-US"/>
               <a:t>Fourth level</a:t>
             </a:r>
           </a:p>
           <a:p>
             <a:pPr lvl="4"/>
             <a:r>
-              <a:rPr lang="en-US" smtClean="0"/>
+              <a:rPr lang="en-US"/>
               <a:t>Fifth level</a:t>
             </a:r>
-            <a:endParaRPr lang="en-US"/>
           </a:p>
         </p:txBody>
       </p:sp>
@@ -819,7 +827,7 @@
           <a:p>
             <a:fld id="{5BCAD085-E8A6-8845-BD4E-CB4CCA059FC4}" type="datetimeFigureOut">
               <a:rPr lang="en-US" smtClean="0"/>
-              <a:t>1/27/13</a:t>
+              <a:t>7/1/26</a:t>
             </a:fld>
             <a:endParaRPr lang="en-US"/>
           </a:p>
@@ -922,10 +930,9 @@
           </a:lstStyle>
           <a:p>
             <a:r>
-              <a:rPr lang="en-US" smtClean="0"/>
+              <a:rPr lang="en-US"/>
               <a:t>Click to edit Master title style</a:t>
             </a:r>
-            <a:endParaRPr lang="en-US"/>
           </a:p>
         </p:txBody>
       </p:sp>
@@ -1042,7 +1049,7 @@
           <a:p>
             <a:pPr lvl="0"/>
             <a:r>
-              <a:rPr lang="en-US" smtClean="0"/>
+              <a:rPr lang="en-US"/>
               <a:t>Click to edit Master text styles</a:t>
             </a:r>
           </a:p>
@@ -1065,7 +1072,7 @@
           <a:p>
             <a:fld id="{5BCAD085-E8A6-8845-BD4E-CB4CCA059FC4}" type="datetimeFigureOut">
               <a:rPr lang="en-US" smtClean="0"/>
-              <a:t>1/27/13</a:t>
+              <a:t>7/1/26</a:t>
             </a:fld>
             <a:endParaRPr lang="en-US"/>
           </a:p>
@@ -1159,10 +1166,9 @@
           <a:lstStyle/>
           <a:p>
             <a:r>
-              <a:rPr lang="en-US" smtClean="0"/>
+              <a:rPr lang="en-US"/>
               <a:t>Click to edit Master title style</a:t>
             </a:r>
-            <a:endParaRPr lang="en-US"/>
           </a:p>
         </p:txBody>
       </p:sp>
@@ -1216,38 +1222,37 @@
           <a:p>
             <a:pPr lvl="0"/>
             <a:r>
-              <a:rPr lang="en-US" smtClean="0"/>
+              <a:rPr lang="en-US"/>
               <a:t>Click to edit Master text styles</a:t>
             </a:r>
           </a:p>
           <a:p>
             <a:pPr lvl="1"/>
             <a:r>
-              <a:rPr lang="en-US" smtClean="0"/>
+              <a:rPr lang="en-US"/>
               <a:t>Second level</a:t>
             </a:r>
           </a:p>
           <a:p>
             <a:pPr lvl="2"/>
             <a:r>
-              <a:rPr lang="en-US" smtClean="0"/>
+              <a:rPr lang="en-US"/>
               <a:t>Third level</a:t>
             </a:r>
           </a:p>
           <a:p>
             <a:pPr lvl="3"/>
             <a:r>
-              <a:rPr lang="en-US" smtClean="0"/>
+              <a:rPr lang="en-US"/>
               <a:t>Fourth level</a:t>
             </a:r>
           </a:p>
           <a:p>
             <a:pPr lvl="4"/>
             <a:r>
-              <a:rPr lang="en-US" smtClean="0"/>
+              <a:rPr lang="en-US"/>
               <a:t>Fifth level</a:t>
             </a:r>
-            <a:endParaRPr lang="en-US"/>
           </a:p>
         </p:txBody>
       </p:sp>
@@ -1301,38 +1306,37 @@
           <a:p>
             <a:pPr lvl="0"/>
             <a:r>
-              <a:rPr lang="en-US" smtClean="0"/>
+              <a:rPr lang="en-US"/>
               <a:t>Click to edit Master text styles</a:t>
             </a:r>
           </a:p>
           <a:p>
             <a:pPr lvl="1"/>
             <a:r>
-              <a:rPr lang="en-US" smtClean="0"/>
+              <a:rPr lang="en-US"/>
               <a:t>Second level</a:t>
             </a:r>
           </a:p>
           <a:p>
             <a:pPr lvl="2"/>
             <a:r>
-              <a:rPr lang="en-US" smtClean="0"/>
+              <a:rPr lang="en-US"/>
               <a:t>Third level</a:t>
             </a:r>
           </a:p>
           <a:p>
             <a:pPr lvl="3"/>
             <a:r>
-              <a:rPr lang="en-US" smtClean="0"/>
+              <a:rPr lang="en-US"/>
               <a:t>Fourth level</a:t>
             </a:r>
           </a:p>
           <a:p>
             <a:pPr lvl="4"/>
             <a:r>
-              <a:rPr lang="en-US" smtClean="0"/>
+              <a:rPr lang="en-US"/>
               <a:t>Fifth level</a:t>
             </a:r>
-            <a:endParaRPr lang="en-US"/>
           </a:p>
         </p:txBody>
       </p:sp>
@@ -1353,7 +1357,7 @@
           <a:p>
             <a:fld id="{5BCAD085-E8A6-8845-BD4E-CB4CCA059FC4}" type="datetimeFigureOut">
               <a:rPr lang="en-US" smtClean="0"/>
-              <a:t>1/27/13</a:t>
+              <a:t>7/1/26</a:t>
             </a:fld>
             <a:endParaRPr lang="en-US"/>
           </a:p>
@@ -1451,10 +1455,9 @@
           </a:lstStyle>
           <a:p>
             <a:r>
-              <a:rPr lang="en-US" smtClean="0"/>
+              <a:rPr lang="en-US"/>
               <a:t>Click to edit Master title style</a:t>
             </a:r>
-            <a:endParaRPr lang="en-US"/>
           </a:p>
         </p:txBody>
       </p:sp>
@@ -1517,7 +1520,7 @@
           <a:p>
             <a:pPr lvl="0"/>
             <a:r>
-              <a:rPr lang="en-US" smtClean="0"/>
+              <a:rPr lang="en-US"/>
               <a:t>Click to edit Master text styles</a:t>
             </a:r>
           </a:p>
@@ -1573,38 +1576,37 @@
           <a:p>
             <a:pPr lvl="0"/>
             <a:r>
-              <a:rPr lang="en-US" smtClean="0"/>
+              <a:rPr lang="en-US"/>
               <a:t>Click to edit Master text styles</a:t>
             </a:r>
           </a:p>
           <a:p>
             <a:pPr lvl="1"/>
             <a:r>
-              <a:rPr lang="en-US" smtClean="0"/>
+              <a:rPr lang="en-US"/>
               <a:t>Second level</a:t>
             </a:r>
           </a:p>
           <a:p>
             <a:pPr lvl="2"/>
             <a:r>
-              <a:rPr lang="en-US" smtClean="0"/>
+              <a:rPr lang="en-US"/>
               <a:t>Third level</a:t>
             </a:r>
           </a:p>
           <a:p>
             <a:pPr lvl="3"/>
             <a:r>
-              <a:rPr lang="en-US" smtClean="0"/>
+              <a:rPr lang="en-US"/>
               <a:t>Fourth level</a:t>
             </a:r>
           </a:p>
           <a:p>
             <a:pPr lvl="4"/>
             <a:r>
-              <a:rPr lang="en-US" smtClean="0"/>
+              <a:rPr lang="en-US"/>
               <a:t>Fifth level</a:t>
             </a:r>
-            <a:endParaRPr lang="en-US"/>
           </a:p>
         </p:txBody>
       </p:sp>
@@ -1667,7 +1669,7 @@
           <a:p>
             <a:pPr lvl="0"/>
             <a:r>
-              <a:rPr lang="en-US" smtClean="0"/>
+              <a:rPr lang="en-US"/>
               <a:t>Click to edit Master text styles</a:t>
             </a:r>
           </a:p>
@@ -1723,38 +1725,37 @@
           <a:p>
             <a:pPr lvl="0"/>
             <a:r>
-              <a:rPr lang="en-US" smtClean="0"/>
+              <a:rPr lang="en-US"/>
               <a:t>Click to edit Master text styles</a:t>
             </a:r>
           </a:p>
           <a:p>
             <a:pPr lvl="1"/>
             <a:r>
-              <a:rPr lang="en-US" smtClean="0"/>
+              <a:rPr lang="en-US"/>
               <a:t>Second level</a:t>
             </a:r>
           </a:p>
           <a:p>
             <a:pPr lvl="2"/>
             <a:r>
-              <a:rPr lang="en-US" smtClean="0"/>
+              <a:rPr lang="en-US"/>
               <a:t>Third level</a:t>
             </a:r>
           </a:p>
           <a:p>
             <a:pPr lvl="3"/>
             <a:r>
-              <a:rPr lang="en-US" smtClean="0"/>
+              <a:rPr lang="en-US"/>
               <a:t>Fourth level</a:t>
             </a:r>
           </a:p>
           <a:p>
             <a:pPr lvl="4"/>
             <a:r>
-              <a:rPr lang="en-US" smtClean="0"/>
+              <a:rPr lang="en-US"/>
               <a:t>Fifth level</a:t>
             </a:r>
-            <a:endParaRPr lang="en-US"/>
           </a:p>
         </p:txBody>
       </p:sp>
@@ -1775,7 +1776,7 @@
           <a:p>
             <a:fld id="{5BCAD085-E8A6-8845-BD4E-CB4CCA059FC4}" type="datetimeFigureOut">
               <a:rPr lang="en-US" smtClean="0"/>
-              <a:t>1/27/13</a:t>
+              <a:t>7/1/26</a:t>
             </a:fld>
             <a:endParaRPr lang="en-US"/>
           </a:p>
@@ -1869,10 +1870,9 @@
           <a:lstStyle/>
           <a:p>
             <a:r>
-              <a:rPr lang="en-US" smtClean="0"/>
+              <a:rPr lang="en-US"/>
               <a:t>Click to edit Master title style</a:t>
             </a:r>
-            <a:endParaRPr lang="en-US"/>
           </a:p>
         </p:txBody>
       </p:sp>
@@ -1893,7 +1893,7 @@
           <a:p>
             <a:fld id="{5BCAD085-E8A6-8845-BD4E-CB4CCA059FC4}" type="datetimeFigureOut">
               <a:rPr lang="en-US" smtClean="0"/>
-              <a:t>1/27/13</a:t>
+              <a:t>7/1/26</a:t>
             </a:fld>
             <a:endParaRPr lang="en-US"/>
           </a:p>
@@ -1988,7 +1988,7 @@
           <a:p>
             <a:fld id="{5BCAD085-E8A6-8845-BD4E-CB4CCA059FC4}" type="datetimeFigureOut">
               <a:rPr lang="en-US" smtClean="0"/>
-              <a:t>1/27/13</a:t>
+              <a:t>7/1/26</a:t>
             </a:fld>
             <a:endParaRPr lang="en-US"/>
           </a:p>
@@ -2091,10 +2091,9 @@
           </a:lstStyle>
           <a:p>
             <a:r>
-              <a:rPr lang="en-US" smtClean="0"/>
+              <a:rPr lang="en-US"/>
               <a:t>Click to edit Master title style</a:t>
             </a:r>
-            <a:endParaRPr lang="en-US"/>
           </a:p>
         </p:txBody>
       </p:sp>
@@ -2148,38 +2147,37 @@
           <a:p>
             <a:pPr lvl="0"/>
             <a:r>
-              <a:rPr lang="en-US" smtClean="0"/>
+              <a:rPr lang="en-US"/>
               <a:t>Click to edit Master text styles</a:t>
             </a:r>
           </a:p>
           <a:p>
             <a:pPr lvl="1"/>
             <a:r>
-              <a:rPr lang="en-US" smtClean="0"/>
+              <a:rPr lang="en-US"/>
               <a:t>Second level</a:t>
             </a:r>
           </a:p>
           <a:p>
             <a:pPr lvl="2"/>
             <a:r>
-              <a:rPr lang="en-US" smtClean="0"/>
+              <a:rPr lang="en-US"/>
               <a:t>Third level</a:t>
             </a:r>
           </a:p>
           <a:p>
             <a:pPr lvl="3"/>
             <a:r>
-              <a:rPr lang="en-US" smtClean="0"/>
+              <a:rPr lang="en-US"/>
               <a:t>Fourth level</a:t>
             </a:r>
           </a:p>
           <a:p>
             <a:pPr lvl="4"/>
             <a:r>
-              <a:rPr lang="en-US" smtClean="0"/>
+              <a:rPr lang="en-US"/>
               <a:t>Fifth level</a:t>
             </a:r>
-            <a:endParaRPr lang="en-US"/>
           </a:p>
         </p:txBody>
       </p:sp>
@@ -2242,7 +2240,7 @@
           <a:p>
             <a:pPr lvl="0"/>
             <a:r>
-              <a:rPr lang="en-US" smtClean="0"/>
+              <a:rPr lang="en-US"/>
               <a:t>Click to edit Master text styles</a:t>
             </a:r>
           </a:p>
@@ -2265,7 +2263,7 @@
           <a:p>
             <a:fld id="{5BCAD085-E8A6-8845-BD4E-CB4CCA059FC4}" type="datetimeFigureOut">
               <a:rPr lang="en-US" smtClean="0"/>
-              <a:t>1/27/13</a:t>
+              <a:t>7/1/26</a:t>
             </a:fld>
             <a:endParaRPr lang="en-US"/>
           </a:p>
@@ -2368,10 +2366,9 @@
           </a:lstStyle>
           <a:p>
             <a:r>
-              <a:rPr lang="en-US" smtClean="0"/>
+              <a:rPr lang="en-US"/>
               <a:t>Click to edit Master title style</a:t>
             </a:r>
-            <a:endParaRPr lang="en-US"/>
           </a:p>
         </p:txBody>
       </p:sp>
@@ -2495,7 +2492,7 @@
           <a:p>
             <a:pPr lvl="0"/>
             <a:r>
-              <a:rPr lang="en-US" smtClean="0"/>
+              <a:rPr lang="en-US"/>
               <a:t>Click to edit Master text styles</a:t>
             </a:r>
           </a:p>
@@ -2518,7 +2515,7 @@
           <a:p>
             <a:fld id="{5BCAD085-E8A6-8845-BD4E-CB4CCA059FC4}" type="datetimeFigureOut">
               <a:rPr lang="en-US" smtClean="0"/>
-              <a:t>1/27/13</a:t>
+              <a:t>7/1/26</a:t>
             </a:fld>
             <a:endParaRPr lang="en-US"/>
           </a:p>
@@ -2627,10 +2624,9 @@
           <a:lstStyle/>
           <a:p>
             <a:r>
-              <a:rPr lang="en-US" smtClean="0"/>
+              <a:rPr lang="en-US"/>
               <a:t>Click to edit Master title style</a:t>
             </a:r>
-            <a:endParaRPr lang="en-US"/>
           </a:p>
         </p:txBody>
       </p:sp>
@@ -2661,38 +2657,37 @@
           <a:p>
             <a:pPr lvl="0"/>
             <a:r>
-              <a:rPr lang="en-US" smtClean="0"/>
+              <a:rPr lang="en-US"/>
               <a:t>Click to edit Master text styles</a:t>
             </a:r>
           </a:p>
           <a:p>
             <a:pPr lvl="1"/>
             <a:r>
-              <a:rPr lang="en-US" smtClean="0"/>
+              <a:rPr lang="en-US"/>
               <a:t>Second level</a:t>
             </a:r>
           </a:p>
           <a:p>
             <a:pPr lvl="2"/>
             <a:r>
-              <a:rPr lang="en-US" smtClean="0"/>
+              <a:rPr lang="en-US"/>
               <a:t>Third level</a:t>
             </a:r>
           </a:p>
           <a:p>
             <a:pPr lvl="3"/>
             <a:r>
-              <a:rPr lang="en-US" smtClean="0"/>
+              <a:rPr lang="en-US"/>
               <a:t>Fourth level</a:t>
             </a:r>
           </a:p>
           <a:p>
             <a:pPr lvl="4"/>
             <a:r>
-              <a:rPr lang="en-US" smtClean="0"/>
+              <a:rPr lang="en-US"/>
               <a:t>Fifth level</a:t>
             </a:r>
-            <a:endParaRPr lang="en-US"/>
           </a:p>
         </p:txBody>
       </p:sp>
@@ -2731,7 +2726,7 @@
           <a:p>
             <a:fld id="{5BCAD085-E8A6-8845-BD4E-CB4CCA059FC4}" type="datetimeFigureOut">
               <a:rPr lang="en-US" smtClean="0"/>
-              <a:t>1/27/13</a:t>
+              <a:t>7/1/26</a:t>
             </a:fld>
             <a:endParaRPr lang="en-US"/>
           </a:p>
@@ -3090,7 +3085,7 @@
 </file>
 
 <file path=ppt/slides/slide1.xml><?xml version="1.0" encoding="utf-8"?>
-<p:sld xmlns:a="http://schemas.openxmlformats.org/drawingml/2006/main" xmlns:p="http://schemas.openxmlformats.org/presentationml/2006/main" xmlns:r="http://schemas.openxmlformats.org/officeDocument/2006/relationships">
+<p:sld xmlns:a="http://schemas.openxmlformats.org/drawingml/2006/main" xmlns:r="http://schemas.openxmlformats.org/officeDocument/2006/relationships" xmlns:p="http://schemas.openxmlformats.org/presentationml/2006/main">
   <p:cSld>
     <p:bg>
       <p:bgPr>
@@ -3106,7 +3101,14 @@
         <p:cNvGrpSpPr/>
         <p:nvPr/>
       </p:nvGrpSpPr>
-      <p:grpSpPr/>
+      <p:grpSpPr>
+        <a:xfrm>
+          <a:off x="0" y="0"/>
+          <a:ext cx="0" cy="0"/>
+          <a:chOff x="0" y="0"/>
+          <a:chExt cx="0" cy="0"/>
+        </a:xfrm>
+      </p:grpSpPr>
       <p:sp>
         <p:nvSpPr>
           <p:cNvPr id="2" name="TextBox 1"/>
@@ -3131,13 +3133,18 @@
           <a:p>
             <a:pPr algn="l"/>
             <a:r>
-              <a:rPr sz="4800" b="1">
+              <a:rPr sz="4800" b="1" dirty="0" err="1">
                 <a:solidFill>
                   <a:srgbClr val="FFFFFF"/>
                 </a:solidFill>
               </a:rPr>
               <a:t>SapioSpend</a:t>
             </a:r>
+            <a:endParaRPr sz="4800" b="1" dirty="0">
+              <a:solidFill>
+                <a:srgbClr val="FFFFFF"/>
+              </a:solidFill>
+            </a:endParaRPr>
           </a:p>
         </p:txBody>
       </p:sp>
@@ -3149,29 +3156,132 @@
         </p:nvSpPr>
         <p:spPr>
           <a:xfrm>
-            <a:off x="914400" y="3017520"/>
-            <a:ext cx="10058400" cy="457200"/>
-          </a:xfrm>
-          <a:prstGeom prst="rect">
-            <a:avLst/>
-          </a:prstGeom>
-          <a:noFill/>
-        </p:spPr>
-        <p:txBody>
-          <a:bodyPr wrap="square">
-            <a:spAutoFit/>
-          </a:bodyPr>
-          <a:lstStyle/>
-          <a:p>
-            <a:pPr algn="l"/>
-            <a:r>
-              <a:rPr sz="2000" b="0">
+            <a:off x="914400" y="3009499"/>
+            <a:ext cx="10058400" cy="1631216"/>
+          </a:xfrm>
+          <a:prstGeom prst="rect">
+            <a:avLst/>
+          </a:prstGeom>
+          <a:noFill/>
+        </p:spPr>
+        <p:txBody>
+          <a:bodyPr wrap="square">
+            <a:spAutoFit/>
+          </a:bodyPr>
+          <a:lstStyle/>
+          <a:p>
+            <a:pPr algn="l"/>
+            <a:r>
+              <a:rPr sz="2000" b="0" dirty="0">
                 <a:solidFill>
                   <a:srgbClr val="AAAAAA"/>
                 </a:solidFill>
               </a:rPr>
               <a:t>Android Event Budget Planner</a:t>
             </a:r>
+            <a:endParaRPr lang="en-GB" sz="2000" b="0" dirty="0">
+              <a:solidFill>
+                <a:srgbClr val="AAAAAA"/>
+              </a:solidFill>
+            </a:endParaRPr>
+          </a:p>
+          <a:p>
+            <a:r>
+              <a:rPr lang="en-GB" sz="2000" dirty="0">
+                <a:solidFill>
+                  <a:srgbClr val="777777"/>
+                </a:solidFill>
+              </a:rPr>
+              <a:t>Name: Eleazar Cole-Showers.   </a:t>
+            </a:r>
+          </a:p>
+          <a:p>
+            <a:r>
+              <a:rPr lang="en-GB" sz="2000" dirty="0">
+                <a:solidFill>
+                  <a:srgbClr val="777777"/>
+                </a:solidFill>
+              </a:rPr>
+              <a:t>Matriculation Number : 92131419</a:t>
+            </a:r>
+          </a:p>
+          <a:p>
+            <a:r>
+              <a:rPr lang="en-GB" sz="2000" dirty="0">
+                <a:solidFill>
+                  <a:srgbClr val="777777"/>
+                </a:solidFill>
+              </a:rPr>
+              <a:t>Course Code: DLBSEPPSD01_E</a:t>
+            </a:r>
+            <a:br>
+              <a:rPr lang="en-GB" sz="2000" dirty="0">
+                <a:solidFill>
+                  <a:srgbClr val="777777"/>
+                </a:solidFill>
+              </a:rPr>
+            </a:br>
+            <a:r>
+              <a:rPr lang="en-GB" sz="2000" dirty="0" err="1">
+                <a:solidFill>
+                  <a:srgbClr val="777777"/>
+                </a:solidFill>
+              </a:rPr>
+              <a:t>Github</a:t>
+            </a:r>
+            <a:r>
+              <a:rPr lang="en-GB" sz="2000" dirty="0">
+                <a:solidFill>
+                  <a:srgbClr val="777777"/>
+                </a:solidFill>
+              </a:rPr>
+              <a:t>: https://</a:t>
+            </a:r>
+            <a:r>
+              <a:rPr lang="en-GB" sz="2000" dirty="0" err="1">
+                <a:solidFill>
+                  <a:srgbClr val="777777"/>
+                </a:solidFill>
+              </a:rPr>
+              <a:t>github.com</a:t>
+            </a:r>
+            <a:r>
+              <a:rPr lang="en-GB" sz="2000" dirty="0">
+                <a:solidFill>
+                  <a:srgbClr val="777777"/>
+                </a:solidFill>
+              </a:rPr>
+              <a:t>/</a:t>
+            </a:r>
+            <a:r>
+              <a:rPr lang="en-GB" sz="2000" dirty="0" err="1">
+                <a:solidFill>
+                  <a:srgbClr val="777777"/>
+                </a:solidFill>
+              </a:rPr>
+              <a:t>EleazarColeShowers</a:t>
+            </a:r>
+            <a:r>
+              <a:rPr lang="en-GB" sz="2000" dirty="0">
+                <a:solidFill>
+                  <a:srgbClr val="777777"/>
+                </a:solidFill>
+              </a:rPr>
+              <a:t>/</a:t>
+            </a:r>
+            <a:r>
+              <a:rPr lang="en-GB" sz="2000" dirty="0" err="1">
+                <a:solidFill>
+                  <a:srgbClr val="777777"/>
+                </a:solidFill>
+              </a:rPr>
+              <a:t>SapioSpend</a:t>
+            </a:r>
+            <a:endParaRPr lang="en-GB" sz="2000" dirty="0">
+              <a:solidFill>
+                <a:srgbClr val="777777"/>
+              </a:solidFill>
+            </a:endParaRPr>
           </a:p>
         </p:txBody>
       </p:sp>
@@ -3184,28 +3294,63 @@
         <p:spPr>
           <a:xfrm>
             <a:off x="914400" y="5303520"/>
-            <a:ext cx="10058400" cy="365760"/>
-          </a:xfrm>
-          <a:prstGeom prst="rect">
-            <a:avLst/>
-          </a:prstGeom>
-          <a:noFill/>
-        </p:spPr>
-        <p:txBody>
-          <a:bodyPr wrap="square">
-            <a:spAutoFit/>
-          </a:bodyPr>
-          <a:lstStyle/>
-          <a:p>
-            <a:pPr algn="l"/>
-            <a:r>
-              <a:rPr sz="1200" b="0">
+            <a:ext cx="10058400" cy="646331"/>
+          </a:xfrm>
+          <a:prstGeom prst="rect">
+            <a:avLst/>
+          </a:prstGeom>
+          <a:noFill/>
+        </p:spPr>
+        <p:txBody>
+          <a:bodyPr wrap="square">
+            <a:spAutoFit/>
+          </a:bodyPr>
+          <a:lstStyle/>
+          <a:p>
+            <a:pPr algn="l"/>
+            <a:r>
+              <a:rPr lang="en-GB" sz="1200" b="0" dirty="0">
                 <a:solidFill>
                   <a:srgbClr val="777777"/>
                 </a:solidFill>
               </a:rPr>
-              <a:t>Mobile Application Development  ·  IU International University</a:t>
-            </a:r>
+              <a:t>Name: Eleazar Cole-Showers. </a:t>
+            </a:r>
+            <a:r>
+              <a:rPr lang="en-GB" sz="1200" dirty="0">
+                <a:solidFill>
+                  <a:srgbClr val="777777"/>
+                </a:solidFill>
+              </a:rPr>
+              <a:t>  </a:t>
+            </a:r>
+          </a:p>
+          <a:p>
+            <a:pPr algn="l"/>
+            <a:r>
+              <a:rPr lang="en-GB" sz="1200" b="0" dirty="0">
+                <a:solidFill>
+                  <a:srgbClr val="777777"/>
+                </a:solidFill>
+              </a:rPr>
+              <a:t>Matriculation Number : 92131419</a:t>
+            </a:r>
+          </a:p>
+          <a:p>
+            <a:pPr algn="l"/>
+            <a:r>
+              <a:rPr lang="en-GB" sz="1200" dirty="0">
+                <a:solidFill>
+                  <a:srgbClr val="777777"/>
+                </a:solidFill>
+              </a:rPr>
+              <a:t>Course Code: DLBSEPPSD01_E</a:t>
+            </a:r>
+            <a:endParaRPr lang="en-GB" sz="1200" b="0" dirty="0">
+              <a:solidFill>
+                <a:srgbClr val="777777"/>
+              </a:solidFill>
+            </a:endParaRPr>
           </a:p>
         </p:txBody>
       </p:sp>
@@ -3218,7 +3363,7 @@
 </file>
 
 <file path=ppt/slides/slide10.xml><?xml version="1.0" encoding="utf-8"?>
-<p:sld xmlns:a="http://schemas.openxmlformats.org/drawingml/2006/main" xmlns:p="http://schemas.openxmlformats.org/presentationml/2006/main" xmlns:r="http://schemas.openxmlformats.org/officeDocument/2006/relationships">
+<p:sld xmlns:a="http://schemas.openxmlformats.org/drawingml/2006/main" xmlns:r="http://schemas.openxmlformats.org/officeDocument/2006/relationships" xmlns:p="http://schemas.openxmlformats.org/presentationml/2006/main">
   <p:cSld>
     <p:bg>
       <p:bgPr>
@@ -3234,7 +3379,14 @@
         <p:cNvGrpSpPr/>
         <p:nvPr/>
       </p:nvGrpSpPr>
-      <p:grpSpPr/>
+      <p:grpSpPr>
+        <a:xfrm>
+          <a:off x="0" y="0"/>
+          <a:ext cx="0" cy="0"/>
+          <a:chOff x="0" y="0"/>
+          <a:chExt cx="0" cy="0"/>
+        </a:xfrm>
+      </p:grpSpPr>
       <p:sp>
         <p:nvSpPr>
           <p:cNvPr id="2" name="TextBox 1"/>
@@ -3343,6 +3495,7 @@
           <a:lstStyle/>
           <a:p>
             <a:pPr algn="ctr"/>
+            <a:endParaRPr/>
           </a:p>
         </p:txBody>
       </p:sp>
@@ -3388,6 +3541,7 @@
           <a:lstStyle/>
           <a:p>
             <a:pPr algn="ctr"/>
+            <a:endParaRPr/>
           </a:p>
         </p:txBody>
       </p:sp>
@@ -3672,6 +3826,7 @@
           <a:lstStyle/>
           <a:p>
             <a:pPr algn="ctr"/>
+            <a:endParaRPr/>
           </a:p>
         </p:txBody>
       </p:sp>
@@ -3956,6 +4111,7 @@
           <a:lstStyle/>
           <a:p>
             <a:pPr algn="ctr"/>
+            <a:endParaRPr/>
           </a:p>
         </p:txBody>
       </p:sp>
@@ -4207,7 +4363,7 @@
 </file>
 
 <file path=ppt/slides/slide11.xml><?xml version="1.0" encoding="utf-8"?>
-<p:sld xmlns:a="http://schemas.openxmlformats.org/drawingml/2006/main" xmlns:p="http://schemas.openxmlformats.org/presentationml/2006/main" xmlns:r="http://schemas.openxmlformats.org/officeDocument/2006/relationships">
+<p:sld xmlns:a="http://schemas.openxmlformats.org/drawingml/2006/main" xmlns:r="http://schemas.openxmlformats.org/officeDocument/2006/relationships" xmlns:p="http://schemas.openxmlformats.org/presentationml/2006/main">
   <p:cSld>
     <p:bg>
       <p:bgPr>
@@ -4223,7 +4379,14 @@
         <p:cNvGrpSpPr/>
         <p:nvPr/>
       </p:nvGrpSpPr>
-      <p:grpSpPr/>
+      <p:grpSpPr>
+        <a:xfrm>
+          <a:off x="0" y="0"/>
+          <a:ext cx="0" cy="0"/>
+          <a:chOff x="0" y="0"/>
+          <a:chExt cx="0" cy="0"/>
+        </a:xfrm>
+      </p:grpSpPr>
       <p:sp>
         <p:nvSpPr>
           <p:cNvPr id="2" name="TextBox 1"/>
@@ -4298,6 +4461,7 @@
           <a:lstStyle/>
           <a:p>
             <a:pPr algn="ctr"/>
+            <a:endParaRPr/>
           </a:p>
         </p:txBody>
       </p:sp>
@@ -4650,7 +4814,7 @@
 </file>
 
 <file path=ppt/slides/slide12.xml><?xml version="1.0" encoding="utf-8"?>
-<p:sld xmlns:a="http://schemas.openxmlformats.org/drawingml/2006/main" xmlns:p="http://schemas.openxmlformats.org/presentationml/2006/main" xmlns:r="http://schemas.openxmlformats.org/officeDocument/2006/relationships">
+<p:sld xmlns:a="http://schemas.openxmlformats.org/drawingml/2006/main" xmlns:r="http://schemas.openxmlformats.org/officeDocument/2006/relationships" xmlns:p="http://schemas.openxmlformats.org/presentationml/2006/main">
   <p:cSld>
     <p:bg>
       <p:bgPr>
@@ -4666,7 +4830,14 @@
         <p:cNvGrpSpPr/>
         <p:nvPr/>
       </p:nvGrpSpPr>
-      <p:grpSpPr/>
+      <p:grpSpPr>
+        <a:xfrm>
+          <a:off x="0" y="0"/>
+          <a:ext cx="0" cy="0"/>
+          <a:chOff x="0" y="0"/>
+          <a:chExt cx="0" cy="0"/>
+        </a:xfrm>
+      </p:grpSpPr>
       <p:sp>
         <p:nvSpPr>
           <p:cNvPr id="2" name="TextBox 1"/>
@@ -4741,6 +4912,7 @@
           <a:lstStyle/>
           <a:p>
             <a:pPr algn="ctr"/>
+            <a:endParaRPr/>
           </a:p>
         </p:txBody>
       </p:sp>
@@ -5093,7 +5265,7 @@
 </file>
 
 <file path=ppt/slides/slide2.xml><?xml version="1.0" encoding="utf-8"?>
-<p:sld xmlns:a="http://schemas.openxmlformats.org/drawingml/2006/main" xmlns:p="http://schemas.openxmlformats.org/presentationml/2006/main" xmlns:r="http://schemas.openxmlformats.org/officeDocument/2006/relationships">
+<p:sld xmlns:a="http://schemas.openxmlformats.org/drawingml/2006/main" xmlns:r="http://schemas.openxmlformats.org/officeDocument/2006/relationships" xmlns:p="http://schemas.openxmlformats.org/presentationml/2006/main">
   <p:cSld>
     <p:bg>
       <p:bgPr>
@@ -5109,7 +5281,14 @@
         <p:cNvGrpSpPr/>
         <p:nvPr/>
       </p:nvGrpSpPr>
-      <p:grpSpPr/>
+      <p:grpSpPr>
+        <a:xfrm>
+          <a:off x="0" y="0"/>
+          <a:ext cx="0" cy="0"/>
+          <a:chOff x="0" y="0"/>
+          <a:chExt cx="0" cy="0"/>
+        </a:xfrm>
+      </p:grpSpPr>
       <p:sp>
         <p:nvSpPr>
           <p:cNvPr id="2" name="TextBox 1"/>
@@ -5184,6 +5363,7 @@
           <a:lstStyle/>
           <a:p>
             <a:pPr algn="ctr"/>
+            <a:endParaRPr/>
           </a:p>
         </p:txBody>
       </p:sp>
@@ -5502,7 +5682,7 @@
 </file>
 
 <file path=ppt/slides/slide3.xml><?xml version="1.0" encoding="utf-8"?>
-<p:sld xmlns:a="http://schemas.openxmlformats.org/drawingml/2006/main" xmlns:p="http://schemas.openxmlformats.org/presentationml/2006/main" xmlns:r="http://schemas.openxmlformats.org/officeDocument/2006/relationships">
+<p:sld xmlns:a="http://schemas.openxmlformats.org/drawingml/2006/main" xmlns:r="http://schemas.openxmlformats.org/officeDocument/2006/relationships" xmlns:p="http://schemas.openxmlformats.org/presentationml/2006/main">
   <p:cSld>
     <p:bg>
       <p:bgPr>
@@ -5518,7 +5698,14 @@
         <p:cNvGrpSpPr/>
         <p:nvPr/>
       </p:nvGrpSpPr>
-      <p:grpSpPr/>
+      <p:grpSpPr>
+        <a:xfrm>
+          <a:off x="0" y="0"/>
+          <a:ext cx="0" cy="0"/>
+          <a:chOff x="0" y="0"/>
+          <a:chExt cx="0" cy="0"/>
+        </a:xfrm>
+      </p:grpSpPr>
       <p:sp>
         <p:nvSpPr>
           <p:cNvPr id="2" name="TextBox 1"/>
@@ -5627,6 +5814,7 @@
           <a:lstStyle/>
           <a:p>
             <a:pPr algn="ctr"/>
+            <a:endParaRPr/>
           </a:p>
         </p:txBody>
       </p:sp>
@@ -5670,6 +5858,7 @@
           <a:lstStyle/>
           <a:p>
             <a:pPr algn="ctr"/>
+            <a:endParaRPr/>
           </a:p>
         </p:txBody>
       </p:sp>
@@ -5781,6 +5970,7 @@
           <a:lstStyle/>
           <a:p>
             <a:pPr algn="ctr"/>
+            <a:endParaRPr/>
           </a:p>
         </p:txBody>
       </p:sp>
@@ -5892,6 +6082,7 @@
           <a:lstStyle/>
           <a:p>
             <a:pPr algn="ctr"/>
+            <a:endParaRPr/>
           </a:p>
         </p:txBody>
       </p:sp>
@@ -6003,6 +6194,7 @@
           <a:lstStyle/>
           <a:p>
             <a:pPr algn="ctr"/>
+            <a:endParaRPr/>
           </a:p>
         </p:txBody>
       </p:sp>
@@ -6083,7 +6275,7 @@
 </file>
 
 <file path=ppt/slides/slide4.xml><?xml version="1.0" encoding="utf-8"?>
-<p:sld xmlns:a="http://schemas.openxmlformats.org/drawingml/2006/main" xmlns:p="http://schemas.openxmlformats.org/presentationml/2006/main" xmlns:r="http://schemas.openxmlformats.org/officeDocument/2006/relationships">
+<p:sld xmlns:a="http://schemas.openxmlformats.org/drawingml/2006/main" xmlns:r="http://schemas.openxmlformats.org/officeDocument/2006/relationships" xmlns:p="http://schemas.openxmlformats.org/presentationml/2006/main">
   <p:cSld>
     <p:bg>
       <p:bgPr>
@@ -6099,7 +6291,14 @@
         <p:cNvGrpSpPr/>
         <p:nvPr/>
       </p:nvGrpSpPr>
-      <p:grpSpPr/>
+      <p:grpSpPr>
+        <a:xfrm>
+          <a:off x="0" y="0"/>
+          <a:ext cx="0" cy="0"/>
+          <a:chOff x="0" y="0"/>
+          <a:chExt cx="0" cy="0"/>
+        </a:xfrm>
+      </p:grpSpPr>
       <p:sp>
         <p:nvSpPr>
           <p:cNvPr id="2" name="TextBox 1"/>
@@ -6208,6 +6407,7 @@
           <a:lstStyle/>
           <a:p>
             <a:pPr algn="ctr"/>
+            <a:endParaRPr/>
           </a:p>
         </p:txBody>
       </p:sp>
@@ -6287,6 +6487,7 @@
           <a:lstStyle/>
           <a:p>
             <a:pPr algn="ctr"/>
+            <a:endParaRPr/>
           </a:p>
         </p:txBody>
       </p:sp>
@@ -6510,6 +6711,7 @@
           <a:lstStyle/>
           <a:p>
             <a:pPr algn="ctr"/>
+            <a:endParaRPr/>
           </a:p>
         </p:txBody>
       </p:sp>
@@ -6733,6 +6935,7 @@
           <a:lstStyle/>
           <a:p>
             <a:pPr algn="ctr"/>
+            <a:endParaRPr/>
           </a:p>
         </p:txBody>
       </p:sp>
@@ -6956,6 +7159,7 @@
           <a:lstStyle/>
           <a:p>
             <a:pPr algn="ctr"/>
+            <a:endParaRPr/>
           </a:p>
         </p:txBody>
       </p:sp>
@@ -7112,7 +7316,7 @@
 </file>
 
 <file path=ppt/slides/slide5.xml><?xml version="1.0" encoding="utf-8"?>
-<p:sld xmlns:a="http://schemas.openxmlformats.org/drawingml/2006/main" xmlns:p="http://schemas.openxmlformats.org/presentationml/2006/main" xmlns:r="http://schemas.openxmlformats.org/officeDocument/2006/relationships">
+<p:sld xmlns:a="http://schemas.openxmlformats.org/drawingml/2006/main" xmlns:r="http://schemas.openxmlformats.org/officeDocument/2006/relationships" xmlns:p="http://schemas.openxmlformats.org/presentationml/2006/main">
   <p:cSld>
     <p:bg>
       <p:bgPr>
@@ -7128,7 +7332,14 @@
         <p:cNvGrpSpPr/>
         <p:nvPr/>
       </p:nvGrpSpPr>
-      <p:grpSpPr/>
+      <p:grpSpPr>
+        <a:xfrm>
+          <a:off x="0" y="0"/>
+          <a:ext cx="0" cy="0"/>
+          <a:chOff x="0" y="0"/>
+          <a:chExt cx="0" cy="0"/>
+        </a:xfrm>
+      </p:grpSpPr>
       <p:sp>
         <p:nvSpPr>
           <p:cNvPr id="2" name="TextBox 1"/>
@@ -7187,7 +7398,7 @@
           <a:p>
             <a:pPr algn="l"/>
             <a:r>
-              <a:rPr sz="1300" b="0">
+              <a:rPr sz="1300" b="0" dirty="0">
                 <a:solidFill>
                   <a:srgbClr val="6B7280"/>
                 </a:solidFill>
@@ -7237,6 +7448,7 @@
           <a:lstStyle/>
           <a:p>
             <a:pPr algn="ctr"/>
+            <a:endParaRPr/>
           </a:p>
         </p:txBody>
       </p:sp>
@@ -7282,6 +7494,7 @@
           <a:lstStyle/>
           <a:p>
             <a:pPr algn="ctr"/>
+            <a:endParaRPr/>
           </a:p>
         </p:txBody>
       </p:sp>
@@ -7396,6 +7609,7 @@
           <a:lstStyle/>
           <a:p>
             <a:pPr algn="ctr"/>
+            <a:endParaRPr/>
           </a:p>
         </p:txBody>
       </p:sp>
@@ -7510,6 +7724,7 @@
           <a:lstStyle/>
           <a:p>
             <a:pPr algn="ctr"/>
+            <a:endParaRPr/>
           </a:p>
         </p:txBody>
       </p:sp>
@@ -7623,6 +7838,7 @@
           <a:lstStyle/>
           <a:p>
             <a:pPr algn="ctr"/>
+            <a:endParaRPr/>
           </a:p>
         </p:txBody>
       </p:sp>
@@ -7734,6 +7950,7 @@
           <a:lstStyle/>
           <a:p>
             <a:pPr algn="ctr"/>
+            <a:endParaRPr/>
           </a:p>
         </p:txBody>
       </p:sp>
@@ -7811,6 +8028,7 @@
           <a:lstStyle/>
           <a:p>
             <a:pPr algn="ctr"/>
+            <a:endParaRPr/>
           </a:p>
         </p:txBody>
       </p:sp>
@@ -7888,6 +8106,7 @@
           <a:lstStyle/>
           <a:p>
             <a:pPr algn="ctr"/>
+            <a:endParaRPr/>
           </a:p>
         </p:txBody>
       </p:sp>
@@ -8171,7 +8390,7 @@
         </p:nvSpPr>
         <p:spPr>
           <a:xfrm>
-            <a:off x="8229600" y="5943600"/>
+            <a:off x="8303079" y="5990953"/>
             <a:ext cx="3566160" cy="292608"/>
           </a:xfrm>
           <a:prstGeom prst="rect">
@@ -8206,7 +8425,7 @@
 </file>
 
 <file path=ppt/slides/slide6.xml><?xml version="1.0" encoding="utf-8"?>
-<p:sld xmlns:a="http://schemas.openxmlformats.org/drawingml/2006/main" xmlns:p="http://schemas.openxmlformats.org/presentationml/2006/main" xmlns:r="http://schemas.openxmlformats.org/officeDocument/2006/relationships">
+<p:sld xmlns:a="http://schemas.openxmlformats.org/drawingml/2006/main" xmlns:r="http://schemas.openxmlformats.org/officeDocument/2006/relationships" xmlns:p="http://schemas.openxmlformats.org/presentationml/2006/main">
   <p:cSld>
     <p:bg>
       <p:bgPr>
@@ -8222,7 +8441,14 @@
         <p:cNvGrpSpPr/>
         <p:nvPr/>
       </p:nvGrpSpPr>
-      <p:grpSpPr/>
+      <p:grpSpPr>
+        <a:xfrm>
+          <a:off x="0" y="0"/>
+          <a:ext cx="0" cy="0"/>
+          <a:chOff x="0" y="0"/>
+          <a:chExt cx="0" cy="0"/>
+        </a:xfrm>
+      </p:grpSpPr>
       <p:sp>
         <p:nvSpPr>
           <p:cNvPr id="2" name="TextBox 1"/>
@@ -8331,6 +8557,7 @@
           <a:lstStyle/>
           <a:p>
             <a:pPr algn="ctr"/>
+            <a:endParaRPr/>
           </a:p>
         </p:txBody>
       </p:sp>
@@ -8410,6 +8637,7 @@
           <a:lstStyle/>
           <a:p>
             <a:pPr algn="ctr"/>
+            <a:endParaRPr/>
           </a:p>
         </p:txBody>
       </p:sp>
@@ -8693,6 +8921,7 @@
           <a:lstStyle/>
           <a:p>
             <a:pPr algn="ctr"/>
+            <a:endParaRPr/>
           </a:p>
         </p:txBody>
       </p:sp>
@@ -8908,6 +9137,7 @@
           <a:lstStyle/>
           <a:p>
             <a:pPr algn="ctr"/>
+            <a:endParaRPr/>
           </a:p>
         </p:txBody>
       </p:sp>
@@ -9192,7 +9422,7 @@
 </file>
 
 <file path=ppt/slides/slide7.xml><?xml version="1.0" encoding="utf-8"?>
-<p:sld xmlns:a="http://schemas.openxmlformats.org/drawingml/2006/main" xmlns:p="http://schemas.openxmlformats.org/presentationml/2006/main" xmlns:r="http://schemas.openxmlformats.org/officeDocument/2006/relationships">
+<p:sld xmlns:a="http://schemas.openxmlformats.org/drawingml/2006/main" xmlns:r="http://schemas.openxmlformats.org/officeDocument/2006/relationships" xmlns:p="http://schemas.openxmlformats.org/presentationml/2006/main">
   <p:cSld>
     <p:bg>
       <p:bgPr>
@@ -9208,7 +9438,14 @@
         <p:cNvGrpSpPr/>
         <p:nvPr/>
       </p:nvGrpSpPr>
-      <p:grpSpPr/>
+      <p:grpSpPr>
+        <a:xfrm>
+          <a:off x="0" y="0"/>
+          <a:ext cx="0" cy="0"/>
+          <a:chOff x="0" y="0"/>
+          <a:chExt cx="0" cy="0"/>
+        </a:xfrm>
+      </p:grpSpPr>
       <p:sp>
         <p:nvSpPr>
           <p:cNvPr id="2" name="TextBox 1"/>
@@ -9317,6 +9554,7 @@
           <a:lstStyle/>
           <a:p>
             <a:pPr algn="ctr"/>
+            <a:endParaRPr/>
           </a:p>
         </p:txBody>
       </p:sp>
@@ -9396,6 +9634,7 @@
           <a:lstStyle/>
           <a:p>
             <a:pPr algn="ctr"/>
+            <a:endParaRPr/>
           </a:p>
         </p:txBody>
       </p:sp>
@@ -9422,29 +9661,62 @@
           <a:lstStyle/>
           <a:p>
             <a:r>
-              <a:rPr sz="1000">
-                <a:solidFill>
-                  <a:srgbClr val="1F2937"/>
-                </a:solidFill>
-                <a:latin typeface="Courier New"/>
-              </a:rPr>
-              <a:t>// Routes.kt</a:t>
-            </a:r>
-          </a:p>
-          <a:p>
-            <a:r>
-              <a:rPr sz="1000">
-                <a:solidFill>
-                  <a:srgbClr val="1F2937"/>
-                </a:solidFill>
-                <a:latin typeface="Courier New"/>
-              </a:rPr>
-              <a:t>sealed class Routes(val route: String) {</a:t>
-            </a:r>
-          </a:p>
-          <a:p>
-            <a:r>
-              <a:rPr sz="1000">
+              <a:rPr sz="1000" dirty="0">
+                <a:solidFill>
+                  <a:srgbClr val="1F2937"/>
+                </a:solidFill>
+                <a:latin typeface="Courier New"/>
+              </a:rPr>
+              <a:t>// </a:t>
+            </a:r>
+            <a:r>
+              <a:rPr sz="1000" dirty="0" err="1">
+                <a:solidFill>
+                  <a:srgbClr val="1F2937"/>
+                </a:solidFill>
+                <a:latin typeface="Courier New"/>
+              </a:rPr>
+              <a:t>Routes.kt</a:t>
+            </a:r>
+            <a:endParaRPr sz="1000" dirty="0">
+              <a:solidFill>
+                <a:srgbClr val="1F2937"/>
+              </a:solidFill>
+              <a:latin typeface="Courier New"/>
+            </a:endParaRPr>
+          </a:p>
+          <a:p>
+            <a:r>
+              <a:rPr sz="1000" dirty="0">
+                <a:solidFill>
+                  <a:srgbClr val="1F2937"/>
+                </a:solidFill>
+                <a:latin typeface="Courier New"/>
+              </a:rPr>
+              <a:t>sealed class Routes(</a:t>
+            </a:r>
+            <a:r>
+              <a:rPr sz="1000" dirty="0" err="1">
+                <a:solidFill>
+                  <a:srgbClr val="1F2937"/>
+                </a:solidFill>
+                <a:latin typeface="Courier New"/>
+              </a:rPr>
+              <a:t>val</a:t>
+            </a:r>
+            <a:r>
+              <a:rPr sz="1000" dirty="0">
+                <a:solidFill>
+                  <a:srgbClr val="1F2937"/>
+                </a:solidFill>
+                <a:latin typeface="Courier New"/>
+              </a:rPr>
+              <a:t> route: String) {</a:t>
+            </a:r>
+          </a:p>
+          <a:p>
+            <a:r>
+              <a:rPr sz="1000" dirty="0">
                 <a:solidFill>
                   <a:srgbClr val="1F2937"/>
                 </a:solidFill>
@@ -9455,40 +9727,130 @@
           </a:p>
           <a:p>
             <a:r>
-              <a:rPr sz="1000">
-                <a:solidFill>
-                  <a:srgbClr val="1F2937"/>
-                </a:solidFill>
-                <a:latin typeface="Courier New"/>
-              </a:rPr>
-              <a:t>    object AddEvent : Routes("add_event")</a:t>
-            </a:r>
-          </a:p>
-          <a:p>
-            <a:r>
-              <a:rPr sz="1000">
-                <a:solidFill>
-                  <a:srgbClr val="1F2937"/>
-                </a:solidFill>
-                <a:latin typeface="Courier New"/>
-              </a:rPr>
-              <a:t>    object EventDetail : Routes("event/{eventId}") {</a:t>
-            </a:r>
-          </a:p>
-          <a:p>
-            <a:r>
-              <a:rPr sz="1000">
-                <a:solidFill>
-                  <a:srgbClr val="1F2937"/>
-                </a:solidFill>
-                <a:latin typeface="Courier New"/>
-              </a:rPr>
-              <a:t>        fun createRoute(id: Int) = "event/$id"</a:t>
-            </a:r>
-          </a:p>
-          <a:p>
-            <a:r>
-              <a:rPr sz="1000">
+              <a:rPr sz="1000" dirty="0">
+                <a:solidFill>
+                  <a:srgbClr val="1F2937"/>
+                </a:solidFill>
+                <a:latin typeface="Courier New"/>
+              </a:rPr>
+              <a:t>    object </a:t>
+            </a:r>
+            <a:r>
+              <a:rPr sz="1000" dirty="0" err="1">
+                <a:solidFill>
+                  <a:srgbClr val="1F2937"/>
+                </a:solidFill>
+                <a:latin typeface="Courier New"/>
+              </a:rPr>
+              <a:t>AddEvent</a:t>
+            </a:r>
+            <a:r>
+              <a:rPr sz="1000" dirty="0">
+                <a:solidFill>
+                  <a:srgbClr val="1F2937"/>
+                </a:solidFill>
+                <a:latin typeface="Courier New"/>
+              </a:rPr>
+              <a:t> : Routes("</a:t>
+            </a:r>
+            <a:r>
+              <a:rPr sz="1000" dirty="0" err="1">
+                <a:solidFill>
+                  <a:srgbClr val="1F2937"/>
+                </a:solidFill>
+                <a:latin typeface="Courier New"/>
+              </a:rPr>
+              <a:t>add_event</a:t>
+            </a:r>
+            <a:r>
+              <a:rPr sz="1000" dirty="0">
+                <a:solidFill>
+                  <a:srgbClr val="1F2937"/>
+                </a:solidFill>
+                <a:latin typeface="Courier New"/>
+              </a:rPr>
+              <a:t>")</a:t>
+            </a:r>
+          </a:p>
+          <a:p>
+            <a:r>
+              <a:rPr sz="1000" dirty="0">
+                <a:solidFill>
+                  <a:srgbClr val="1F2937"/>
+                </a:solidFill>
+                <a:latin typeface="Courier New"/>
+              </a:rPr>
+              <a:t>    object </a:t>
+            </a:r>
+            <a:r>
+              <a:rPr sz="1000" dirty="0" err="1">
+                <a:solidFill>
+                  <a:srgbClr val="1F2937"/>
+                </a:solidFill>
+                <a:latin typeface="Courier New"/>
+              </a:rPr>
+              <a:t>EventDetail</a:t>
+            </a:r>
+            <a:r>
+              <a:rPr sz="1000" dirty="0">
+                <a:solidFill>
+                  <a:srgbClr val="1F2937"/>
+                </a:solidFill>
+                <a:latin typeface="Courier New"/>
+              </a:rPr>
+              <a:t> : Routes("event/{</a:t>
+            </a:r>
+            <a:r>
+              <a:rPr sz="1000" dirty="0" err="1">
+                <a:solidFill>
+                  <a:srgbClr val="1F2937"/>
+                </a:solidFill>
+                <a:latin typeface="Courier New"/>
+              </a:rPr>
+              <a:t>eventId</a:t>
+            </a:r>
+            <a:r>
+              <a:rPr sz="1000" dirty="0">
+                <a:solidFill>
+                  <a:srgbClr val="1F2937"/>
+                </a:solidFill>
+                <a:latin typeface="Courier New"/>
+              </a:rPr>
+              <a:t>}") {</a:t>
+            </a:r>
+          </a:p>
+          <a:p>
+            <a:r>
+              <a:rPr sz="1000" dirty="0">
+                <a:solidFill>
+                  <a:srgbClr val="1F2937"/>
+                </a:solidFill>
+                <a:latin typeface="Courier New"/>
+              </a:rPr>
+              <a:t>        fun </a:t>
+            </a:r>
+            <a:r>
+              <a:rPr sz="1000" dirty="0" err="1">
+                <a:solidFill>
+                  <a:srgbClr val="1F2937"/>
+                </a:solidFill>
+                <a:latin typeface="Courier New"/>
+              </a:rPr>
+              <a:t>createRoute</a:t>
+            </a:r>
+            <a:r>
+              <a:rPr sz="1000" dirty="0">
+                <a:solidFill>
+                  <a:srgbClr val="1F2937"/>
+                </a:solidFill>
+                <a:latin typeface="Courier New"/>
+              </a:rPr>
+              <a:t>(id: Int) = "event/$id"</a:t>
+            </a:r>
+          </a:p>
+          <a:p>
+            <a:r>
+              <a:rPr sz="1000" dirty="0">
                 <a:solidFill>
                   <a:srgbClr val="1F2937"/>
                 </a:solidFill>
@@ -9499,29 +9861,101 @@
           </a:p>
           <a:p>
             <a:r>
-              <a:rPr sz="1000">
-                <a:solidFill>
-                  <a:srgbClr val="1F2937"/>
-                </a:solidFill>
-                <a:latin typeface="Courier New"/>
-              </a:rPr>
-              <a:t>    object AddExpense : Routes("add_expense/{eventId}") {</a:t>
-            </a:r>
-          </a:p>
-          <a:p>
-            <a:r>
-              <a:rPr sz="1000">
-                <a:solidFill>
-                  <a:srgbClr val="1F2937"/>
-                </a:solidFill>
-                <a:latin typeface="Courier New"/>
-              </a:rPr>
-              <a:t>        fun createRoute(id: Int) = "add_expense/$id"</a:t>
-            </a:r>
-          </a:p>
-          <a:p>
-            <a:r>
-              <a:rPr sz="1000">
+              <a:rPr sz="1000" dirty="0">
+                <a:solidFill>
+                  <a:srgbClr val="1F2937"/>
+                </a:solidFill>
+                <a:latin typeface="Courier New"/>
+              </a:rPr>
+              <a:t>    object AddExpense : Routes("</a:t>
+            </a:r>
+            <a:r>
+              <a:rPr sz="1000" dirty="0" err="1">
+                <a:solidFill>
+                  <a:srgbClr val="1F2937"/>
+                </a:solidFill>
+                <a:latin typeface="Courier New"/>
+              </a:rPr>
+              <a:t>add_expense</a:t>
+            </a:r>
+            <a:r>
+              <a:rPr sz="1000" dirty="0">
+                <a:solidFill>
+                  <a:srgbClr val="1F2937"/>
+                </a:solidFill>
+                <a:latin typeface="Courier New"/>
+              </a:rPr>
+              <a:t>/{</a:t>
+            </a:r>
+            <a:r>
+              <a:rPr sz="1000" dirty="0" err="1">
+                <a:solidFill>
+                  <a:srgbClr val="1F2937"/>
+                </a:solidFill>
+                <a:latin typeface="Courier New"/>
+              </a:rPr>
+              <a:t>eventId</a:t>
+            </a:r>
+            <a:r>
+              <a:rPr sz="1000" dirty="0">
+                <a:solidFill>
+                  <a:srgbClr val="1F2937"/>
+                </a:solidFill>
+                <a:latin typeface="Courier New"/>
+              </a:rPr>
+              <a:t>}") {</a:t>
+            </a:r>
+          </a:p>
+          <a:p>
+            <a:r>
+              <a:rPr sz="1000" dirty="0">
+                <a:solidFill>
+                  <a:srgbClr val="1F2937"/>
+                </a:solidFill>
+                <a:latin typeface="Courier New"/>
+              </a:rPr>
+              <a:t>        fun </a:t>
+            </a:r>
+            <a:r>
+              <a:rPr sz="1000" dirty="0" err="1">
+                <a:solidFill>
+                  <a:srgbClr val="1F2937"/>
+                </a:solidFill>
+                <a:latin typeface="Courier New"/>
+              </a:rPr>
+              <a:t>createRoute</a:t>
+            </a:r>
+            <a:r>
+              <a:rPr sz="1000" dirty="0">
+                <a:solidFill>
+                  <a:srgbClr val="1F2937"/>
+                </a:solidFill>
+                <a:latin typeface="Courier New"/>
+              </a:rPr>
+              <a:t>(id: Int) = "</a:t>
+            </a:r>
+            <a:r>
+              <a:rPr sz="1000" dirty="0" err="1">
+                <a:solidFill>
+                  <a:srgbClr val="1F2937"/>
+                </a:solidFill>
+                <a:latin typeface="Courier New"/>
+              </a:rPr>
+              <a:t>add_expense</a:t>
+            </a:r>
+            <a:r>
+              <a:rPr sz="1000" dirty="0">
+                <a:solidFill>
+                  <a:srgbClr val="1F2937"/>
+                </a:solidFill>
+                <a:latin typeface="Courier New"/>
+              </a:rPr>
+              <a:t>/$id"</a:t>
+            </a:r>
+          </a:p>
+          <a:p>
+            <a:r>
+              <a:rPr sz="1000" dirty="0">
                 <a:solidFill>
                   <a:srgbClr val="1F2937"/>
                 </a:solidFill>
@@ -9532,7 +9966,7 @@
           </a:p>
           <a:p>
             <a:r>
-              <a:rPr sz="1000">
+              <a:rPr sz="1000" dirty="0">
                 <a:solidFill>
                   <a:srgbClr val="1F2937"/>
                 </a:solidFill>
@@ -9585,6 +10019,7 @@
           <a:lstStyle/>
           <a:p>
             <a:pPr algn="ctr"/>
+            <a:endParaRPr/>
           </a:p>
         </p:txBody>
       </p:sp>
@@ -9797,7 +10232,7 @@
 </file>
 
 <file path=ppt/slides/slide8.xml><?xml version="1.0" encoding="utf-8"?>
-<p:sld xmlns:a="http://schemas.openxmlformats.org/drawingml/2006/main" xmlns:p="http://schemas.openxmlformats.org/presentationml/2006/main" xmlns:r="http://schemas.openxmlformats.org/officeDocument/2006/relationships">
+<p:sld xmlns:a="http://schemas.openxmlformats.org/drawingml/2006/main" xmlns:r="http://schemas.openxmlformats.org/officeDocument/2006/relationships" xmlns:p="http://schemas.openxmlformats.org/presentationml/2006/main">
   <p:cSld>
     <p:bg>
       <p:bgPr>
@@ -9813,7 +10248,14 @@
         <p:cNvGrpSpPr/>
         <p:nvPr/>
       </p:nvGrpSpPr>
-      <p:grpSpPr/>
+      <p:grpSpPr>
+        <a:xfrm>
+          <a:off x="0" y="0"/>
+          <a:ext cx="0" cy="0"/>
+          <a:chOff x="0" y="0"/>
+          <a:chExt cx="0" cy="0"/>
+        </a:xfrm>
+      </p:grpSpPr>
       <p:sp>
         <p:nvSpPr>
           <p:cNvPr id="2" name="TextBox 1"/>
@@ -9922,6 +10364,7 @@
           <a:lstStyle/>
           <a:p>
             <a:pPr algn="ctr"/>
+            <a:endParaRPr/>
           </a:p>
         </p:txBody>
       </p:sp>
@@ -9967,6 +10410,7 @@
           <a:lstStyle/>
           <a:p>
             <a:pPr algn="ctr"/>
+            <a:endParaRPr/>
           </a:p>
         </p:txBody>
       </p:sp>
@@ -10123,6 +10567,7 @@
           <a:lstStyle/>
           <a:p>
             <a:pPr algn="ctr"/>
+            <a:endParaRPr/>
           </a:p>
         </p:txBody>
       </p:sp>
@@ -10321,40 +10766,6 @@
                 <a:latin typeface="Courier New"/>
               </a:rPr>
               <a:t>)</a:t>
-            </a:r>
-          </a:p>
-        </p:txBody>
-      </p:sp>
-      <p:sp>
-        <p:nvSpPr>
-          <p:cNvPr id="9" name="TextBox 8"/>
-          <p:cNvSpPr txBox="1"/>
-          <p:nvPr/>
-        </p:nvSpPr>
-        <p:spPr>
-          <a:xfrm>
-            <a:off x="640080" y="3611880"/>
-            <a:ext cx="10789920" cy="502920"/>
-          </a:xfrm>
-          <a:prstGeom prst="rect">
-            <a:avLst/>
-          </a:prstGeom>
-          <a:noFill/>
-        </p:spPr>
-        <p:txBody>
-          <a:bodyPr wrap="square">
-            <a:spAutoFit/>
-          </a:bodyPr>
-          <a:lstStyle/>
-          <a:p>
-            <a:pPr algn="l"/>
-            <a:r>
-              <a:rPr sz="1300" b="0">
-                <a:solidFill>
-                  <a:srgbClr val="6B7280"/>
-                </a:solidFill>
-              </a:rPr>
-              <a:t>The CASCADE constraint means deleting an event automatically removes all its expenses — no manual cleanup needed in the ViewModel. The index on eventId keeps the filter query fast as the expense list grows.</a:t>
             </a:r>
           </a:p>
         </p:txBody>
@@ -10401,6 +10812,7 @@
           <a:lstStyle/>
           <a:p>
             <a:pPr algn="ctr"/>
+            <a:endParaRPr/>
           </a:p>
         </p:txBody>
       </p:sp>
@@ -10427,18 +10839,36 @@
           <a:lstStyle/>
           <a:p>
             <a:r>
-              <a:rPr sz="1000">
-                <a:solidFill>
-                  <a:srgbClr val="1F2937"/>
-                </a:solidFill>
-                <a:latin typeface="Courier New"/>
-              </a:rPr>
-              <a:t>// EventDao.kt — Flow re-emits whenever the table changes, so the UI updates automatically</a:t>
-            </a:r>
-          </a:p>
-          <a:p>
-            <a:r>
-              <a:rPr sz="1000">
+              <a:rPr sz="1000" dirty="0">
+                <a:solidFill>
+                  <a:srgbClr val="1F2937"/>
+                </a:solidFill>
+                <a:latin typeface="Courier New"/>
+              </a:rPr>
+              <a:t>// </a:t>
+            </a:r>
+            <a:r>
+              <a:rPr sz="1000" dirty="0" err="1">
+                <a:solidFill>
+                  <a:srgbClr val="1F2937"/>
+                </a:solidFill>
+                <a:latin typeface="Courier New"/>
+              </a:rPr>
+              <a:t>EventDao.kt</a:t>
+            </a:r>
+            <a:r>
+              <a:rPr sz="1000" dirty="0">
+                <a:solidFill>
+                  <a:srgbClr val="1F2937"/>
+                </a:solidFill>
+                <a:latin typeface="Courier New"/>
+              </a:rPr>
+              <a:t> — Flow re-emits whenever the table changes, so the UI updates automatically</a:t>
+            </a:r>
+          </a:p>
+          <a:p>
+            <a:r>
+              <a:rPr sz="1000" dirty="0">
                 <a:solidFill>
                   <a:srgbClr val="1F2937"/>
                 </a:solidFill>
@@ -10449,58 +10879,234 @@
           </a:p>
           <a:p>
             <a:r>
-              <a:rPr sz="1000">
-                <a:solidFill>
-                  <a:srgbClr val="1F2937"/>
-                </a:solidFill>
-                <a:latin typeface="Courier New"/>
-              </a:rPr>
-              <a:t>fun getAllEvents(): Flow&lt;List&lt;EventEntity&gt;&gt;</a:t>
-            </a:r>
-          </a:p>
-          <a:p>
-            <a:r>
-              <a:rPr sz="1000">
-                <a:solidFill>
-                  <a:srgbClr val="1F2937"/>
-                </a:solidFill>
-                <a:latin typeface="Courier New"/>
-              </a:rPr>
-              <a:t/>
-            </a:r>
-          </a:p>
-          <a:p>
-            <a:r>
-              <a:rPr sz="1000">
-                <a:solidFill>
-                  <a:srgbClr val="1F2937"/>
-                </a:solidFill>
-                <a:latin typeface="Courier New"/>
-              </a:rPr>
-              <a:t>// ExpenseDao.kt — newest first so the most recent entry appears at the top</a:t>
-            </a:r>
-          </a:p>
-          <a:p>
-            <a:r>
-              <a:rPr sz="1000">
-                <a:solidFill>
-                  <a:srgbClr val="1F2937"/>
-                </a:solidFill>
-                <a:latin typeface="Courier New"/>
-              </a:rPr>
-              <a:t>@Query("SELECT * FROM expenses WHERE eventId = :eventId ORDER BY id DESC")</a:t>
-            </a:r>
-          </a:p>
-          <a:p>
-            <a:r>
-              <a:rPr sz="1000">
-                <a:solidFill>
-                  <a:srgbClr val="1F2937"/>
-                </a:solidFill>
-                <a:latin typeface="Courier New"/>
-              </a:rPr>
-              <a:t>fun getExpensesForEvent(eventId: Int): Flow&lt;List&lt;ExpenseEntity&gt;&gt;</a:t>
-            </a:r>
+              <a:rPr sz="1000" dirty="0">
+                <a:solidFill>
+                  <a:srgbClr val="1F2937"/>
+                </a:solidFill>
+                <a:latin typeface="Courier New"/>
+              </a:rPr>
+              <a:t>fun </a:t>
+            </a:r>
+            <a:r>
+              <a:rPr sz="1000" dirty="0" err="1">
+                <a:solidFill>
+                  <a:srgbClr val="1F2937"/>
+                </a:solidFill>
+                <a:latin typeface="Courier New"/>
+              </a:rPr>
+              <a:t>getAllEvents</a:t>
+            </a:r>
+            <a:r>
+              <a:rPr sz="1000" dirty="0">
+                <a:solidFill>
+                  <a:srgbClr val="1F2937"/>
+                </a:solidFill>
+                <a:latin typeface="Courier New"/>
+              </a:rPr>
+              <a:t>(): Flow&lt;List&lt;</a:t>
+            </a:r>
+            <a:r>
+              <a:rPr sz="1000" dirty="0" err="1">
+                <a:solidFill>
+                  <a:srgbClr val="1F2937"/>
+                </a:solidFill>
+                <a:latin typeface="Courier New"/>
+              </a:rPr>
+              <a:t>EventEntity</a:t>
+            </a:r>
+            <a:r>
+              <a:rPr sz="1000" dirty="0">
+                <a:solidFill>
+                  <a:srgbClr val="1F2937"/>
+                </a:solidFill>
+                <a:latin typeface="Courier New"/>
+              </a:rPr>
+              <a:t>&gt;&gt;</a:t>
+            </a:r>
+          </a:p>
+          <a:p>
+            <a:endParaRPr sz="1000" dirty="0">
+              <a:solidFill>
+                <a:srgbClr val="1F2937"/>
+              </a:solidFill>
+              <a:latin typeface="Courier New"/>
+            </a:endParaRPr>
+          </a:p>
+          <a:p>
+            <a:r>
+              <a:rPr sz="1000" dirty="0">
+                <a:solidFill>
+                  <a:srgbClr val="1F2937"/>
+                </a:solidFill>
+                <a:latin typeface="Courier New"/>
+              </a:rPr>
+              <a:t>// </a:t>
+            </a:r>
+            <a:r>
+              <a:rPr sz="1000" dirty="0" err="1">
+                <a:solidFill>
+                  <a:srgbClr val="1F2937"/>
+                </a:solidFill>
+                <a:latin typeface="Courier New"/>
+              </a:rPr>
+              <a:t>ExpenseDao.kt</a:t>
+            </a:r>
+            <a:r>
+              <a:rPr sz="1000" dirty="0">
+                <a:solidFill>
+                  <a:srgbClr val="1F2937"/>
+                </a:solidFill>
+                <a:latin typeface="Courier New"/>
+              </a:rPr>
+              <a:t> — newest first so the most recent entry appears at the top</a:t>
+            </a:r>
+          </a:p>
+          <a:p>
+            <a:r>
+              <a:rPr sz="1000" dirty="0">
+                <a:solidFill>
+                  <a:srgbClr val="1F2937"/>
+                </a:solidFill>
+                <a:latin typeface="Courier New"/>
+              </a:rPr>
+              <a:t>@Query("SELECT * FROM expenses WHERE </a:t>
+            </a:r>
+            <a:r>
+              <a:rPr sz="1000" dirty="0" err="1">
+                <a:solidFill>
+                  <a:srgbClr val="1F2937"/>
+                </a:solidFill>
+                <a:latin typeface="Courier New"/>
+              </a:rPr>
+              <a:t>eventId</a:t>
+            </a:r>
+            <a:r>
+              <a:rPr sz="1000" dirty="0">
+                <a:solidFill>
+                  <a:srgbClr val="1F2937"/>
+                </a:solidFill>
+                <a:latin typeface="Courier New"/>
+              </a:rPr>
+              <a:t> = :</a:t>
+            </a:r>
+            <a:r>
+              <a:rPr sz="1000" dirty="0" err="1">
+                <a:solidFill>
+                  <a:srgbClr val="1F2937"/>
+                </a:solidFill>
+                <a:latin typeface="Courier New"/>
+              </a:rPr>
+              <a:t>eventId</a:t>
+            </a:r>
+            <a:r>
+              <a:rPr sz="1000" dirty="0">
+                <a:solidFill>
+                  <a:srgbClr val="1F2937"/>
+                </a:solidFill>
+                <a:latin typeface="Courier New"/>
+              </a:rPr>
+              <a:t> ORDER BY id DESC")</a:t>
+            </a:r>
+          </a:p>
+          <a:p>
+            <a:r>
+              <a:rPr sz="1000" dirty="0">
+                <a:solidFill>
+                  <a:srgbClr val="1F2937"/>
+                </a:solidFill>
+                <a:latin typeface="Courier New"/>
+              </a:rPr>
+              <a:t>fun </a:t>
+            </a:r>
+            <a:r>
+              <a:rPr sz="1000" dirty="0" err="1">
+                <a:solidFill>
+                  <a:srgbClr val="1F2937"/>
+                </a:solidFill>
+                <a:latin typeface="Courier New"/>
+              </a:rPr>
+              <a:t>getExpensesForEvent</a:t>
+            </a:r>
+            <a:r>
+              <a:rPr sz="1000" dirty="0">
+                <a:solidFill>
+                  <a:srgbClr val="1F2937"/>
+                </a:solidFill>
+                <a:latin typeface="Courier New"/>
+              </a:rPr>
+              <a:t>(</a:t>
+            </a:r>
+            <a:r>
+              <a:rPr sz="1000" dirty="0" err="1">
+                <a:solidFill>
+                  <a:srgbClr val="1F2937"/>
+                </a:solidFill>
+                <a:latin typeface="Courier New"/>
+              </a:rPr>
+              <a:t>eventId</a:t>
+            </a:r>
+            <a:r>
+              <a:rPr sz="1000" dirty="0">
+                <a:solidFill>
+                  <a:srgbClr val="1F2937"/>
+                </a:solidFill>
+                <a:latin typeface="Courier New"/>
+              </a:rPr>
+              <a:t>: Int): Flow&lt;List&lt;</a:t>
+            </a:r>
+            <a:r>
+              <a:rPr sz="1000" dirty="0" err="1">
+                <a:solidFill>
+                  <a:srgbClr val="1F2937"/>
+                </a:solidFill>
+                <a:latin typeface="Courier New"/>
+              </a:rPr>
+              <a:t>ExpenseEntity</a:t>
+            </a:r>
+            <a:r>
+              <a:rPr sz="1000" dirty="0">
+                <a:solidFill>
+                  <a:srgbClr val="1F2937"/>
+                </a:solidFill>
+                <a:latin typeface="Courier New"/>
+              </a:rPr>
+              <a:t>&gt;&gt;</a:t>
+            </a:r>
+          </a:p>
+        </p:txBody>
+      </p:sp>
+      <p:sp>
+        <p:nvSpPr>
+          <p:cNvPr id="14" name="TextBox 13">
+            <a:extLst>
+              <a:ext uri="{FF2B5EF4-FFF2-40B4-BE49-F238E27FC236}">
+                <a16:creationId xmlns:a16="http://schemas.microsoft.com/office/drawing/2014/main" id="{392F111A-765A-823A-7883-D1C5F4E95E36}"/>
+              </a:ext>
+            </a:extLst>
+          </p:cNvPr>
+          <p:cNvSpPr txBox="1"/>
+          <p:nvPr/>
+        </p:nvSpPr>
+        <p:spPr>
+          <a:xfrm>
+            <a:off x="1000897" y="3954162"/>
+            <a:ext cx="184731" cy="646331"/>
+          </a:xfrm>
+          <a:prstGeom prst="rect">
+            <a:avLst/>
+          </a:prstGeom>
+          <a:noFill/>
+        </p:spPr>
+        <p:txBody>
+          <a:bodyPr wrap="none" rtlCol="0">
+            <a:spAutoFit/>
+          </a:bodyPr>
+          <a:lstStyle/>
+          <a:p>
+            <a:endParaRPr lang="en-US" dirty="0"/>
+          </a:p>
+          <a:p>
+            <a:endParaRPr lang="en-US" dirty="0"/>
           </a:p>
         </p:txBody>
       </p:sp>
@@ -10513,7 +11119,7 @@
 </file>
 
 <file path=ppt/slides/slide9.xml><?xml version="1.0" encoding="utf-8"?>
-<p:sld xmlns:a="http://schemas.openxmlformats.org/drawingml/2006/main" xmlns:p="http://schemas.openxmlformats.org/presentationml/2006/main" xmlns:r="http://schemas.openxmlformats.org/officeDocument/2006/relationships">
+<p:sld xmlns:a="http://schemas.openxmlformats.org/drawingml/2006/main" xmlns:r="http://schemas.openxmlformats.org/officeDocument/2006/relationships" xmlns:p="http://schemas.openxmlformats.org/presentationml/2006/main">
   <p:cSld>
     <p:bg>
       <p:bgPr>
@@ -10529,7 +11135,14 @@
         <p:cNvGrpSpPr/>
         <p:nvPr/>
       </p:nvGrpSpPr>
-      <p:grpSpPr/>
+      <p:grpSpPr>
+        <a:xfrm>
+          <a:off x="0" y="0"/>
+          <a:ext cx="0" cy="0"/>
+          <a:chOff x="0" y="0"/>
+          <a:chExt cx="0" cy="0"/>
+        </a:xfrm>
+      </p:grpSpPr>
       <p:sp>
         <p:nvSpPr>
           <p:cNvPr id="2" name="TextBox 1"/>
@@ -10638,6 +11251,7 @@
           <a:lstStyle/>
           <a:p>
             <a:pPr algn="ctr"/>
+            <a:endParaRPr/>
           </a:p>
         </p:txBody>
       </p:sp>
@@ -10683,6 +11297,7 @@
           <a:lstStyle/>
           <a:p>
             <a:pPr algn="ctr"/>
+            <a:endParaRPr/>
           </a:p>
         </p:txBody>
       </p:sp>
@@ -10752,6 +11367,14 @@
             </a:r>
           </a:p>
           <a:p>
+            <a:endParaRPr sz="1000">
+              <a:solidFill>
+                <a:srgbClr val="1F2937"/>
+              </a:solidFill>
+              <a:latin typeface="Courier New"/>
+            </a:endParaRPr>
+          </a:p>
+          <a:p>
             <a:r>
               <a:rPr sz="1000">
                 <a:solidFill>
@@ -10759,7 +11382,7 @@
                 </a:solidFill>
                 <a:latin typeface="Courier New"/>
               </a:rPr>
-              <a:t/>
+              <a:t>    // 5 000 ms keeps the flow alive across</a:t>
             </a:r>
           </a:p>
           <a:p>
@@ -10770,7 +11393,7 @@
                 </a:solidFill>
                 <a:latin typeface="Courier New"/>
               </a:rPr>
-              <a:t>    // 5 000 ms keeps the flow alive across</a:t>
+              <a:t>    // config changes without leaking.</a:t>
             </a:r>
           </a:p>
           <a:p>
@@ -10781,7 +11404,7 @@
                 </a:solidFill>
                 <a:latin typeface="Courier New"/>
               </a:rPr>
-              <a:t>    // config changes without leaking.</a:t>
+              <a:t>    val events = repository.events.stateIn(</a:t>
             </a:r>
           </a:p>
           <a:p>
@@ -10792,7 +11415,7 @@
                 </a:solidFill>
                 <a:latin typeface="Courier New"/>
               </a:rPr>
-              <a:t>    val events = repository.events.stateIn(</a:t>
+              <a:t>        viewModelScope,</a:t>
             </a:r>
           </a:p>
           <a:p>
@@ -10803,7 +11426,7 @@
                 </a:solidFill>
                 <a:latin typeface="Courier New"/>
               </a:rPr>
-              <a:t>        viewModelScope,</a:t>
+              <a:t>        SharingStarted.WhileSubscribed(5000),</a:t>
             </a:r>
           </a:p>
           <a:p>
@@ -10814,7 +11437,7 @@
                 </a:solidFill>
                 <a:latin typeface="Courier New"/>
               </a:rPr>
-              <a:t>        SharingStarted.WhileSubscribed(5000),</a:t>
+              <a:t>        emptyList()</a:t>
             </a:r>
           </a:p>
           <a:p>
@@ -10825,30 +11448,16 @@
                 </a:solidFill>
                 <a:latin typeface="Courier New"/>
               </a:rPr>
-              <a:t>        emptyList()</a:t>
-            </a:r>
-          </a:p>
-          <a:p>
-            <a:r>
-              <a:rPr sz="1000">
-                <a:solidFill>
-                  <a:srgbClr val="1F2937"/>
-                </a:solidFill>
-                <a:latin typeface="Courier New"/>
-              </a:rPr>
               <a:t>    )</a:t>
             </a:r>
           </a:p>
           <a:p>
-            <a:r>
-              <a:rPr sz="1000">
-                <a:solidFill>
-                  <a:srgbClr val="1F2937"/>
-                </a:solidFill>
-                <a:latin typeface="Courier New"/>
-              </a:rPr>
-              <a:t/>
-            </a:r>
+            <a:endParaRPr sz="1000">
+              <a:solidFill>
+                <a:srgbClr val="1F2937"/>
+              </a:solidFill>
+              <a:latin typeface="Courier New"/>
+            </a:endParaRPr>
           </a:p>
           <a:p>
             <a:r>
@@ -11004,6 +11613,7 @@
           <a:lstStyle/>
           <a:p>
             <a:pPr algn="ctr"/>
+            <a:endParaRPr/>
           </a:p>
         </p:txBody>
       </p:sp>
@@ -11182,6 +11792,7 @@
           <a:lstStyle/>
           <a:p>
             <a:pPr algn="ctr"/>
+            <a:endParaRPr/>
           </a:p>
         </p:txBody>
       </p:sp>
@@ -11262,15 +11873,12 @@
             </a:r>
           </a:p>
           <a:p>
-            <a:r>
-              <a:rPr sz="1000">
-                <a:solidFill>
-                  <a:srgbClr val="1F2937"/>
-                </a:solidFill>
-                <a:latin typeface="Courier New"/>
-              </a:rPr>
-              <a:t/>
-            </a:r>
+            <a:endParaRPr sz="1000">
+              <a:solidFill>
+                <a:srgbClr val="1F2937"/>
+              </a:solidFill>
+              <a:latin typeface="Courier New"/>
+            </a:endParaRPr>
           </a:p>
           <a:p>
             <a:r>
@@ -11320,12 +11928,28 @@
           <a:p>
             <a:pPr algn="l"/>
             <a:r>
-              <a:rPr sz="1200" b="0">
+              <a:rPr sz="1200" b="0" dirty="0">
                 <a:solidFill>
                   <a:srgbClr val="6B7280"/>
                 </a:solidFill>
               </a:rPr>
-              <a:t>Room emits a new list every time the database changes. The StateFlow carries that to the UI, which recomposes automatically — no manual refresh calls anywhere in the app.</a:t>
+              <a:t>Room emits a new list every time the database changes. The </a:t>
+            </a:r>
+            <a:r>
+              <a:rPr sz="1200" b="0" dirty="0" err="1">
+                <a:solidFill>
+                  <a:srgbClr val="6B7280"/>
+                </a:solidFill>
+              </a:rPr>
+              <a:t>StateFlow</a:t>
+            </a:r>
+            <a:r>
+              <a:rPr sz="1200" b="0" dirty="0">
+                <a:solidFill>
+                  <a:srgbClr val="6B7280"/>
+                </a:solidFill>
+              </a:rPr>
+              <a:t> carries that to the UI, which recomposes automatically — no manual refresh calls anywhere in the app.</a:t>
             </a:r>
           </a:p>
         </p:txBody>
